--- a/decks/geog-tectonic-hazards/geog-tectonic-hazards_ch4_earthquakes.pptx
+++ b/decks/geog-tectonic-hazards/geog-tectonic-hazards_ch4_earthquakes.pptx
@@ -126,30 +126,30 @@
   <p:extLst>
     <p:ext uri="{521415D9-36F7-43E2-AB2F-B90AF26B5E84}">
       <p14:sectionLst xmlns:p14="http://schemas.microsoft.com/office/powerpoint/2010/main">
-        <p14:section name="Opening" id="{e97c635f-5a6b-d50e-135e-ac6426f1f6e8}">
+        <p14:section name="Opening" id="{9c48e866-9ff9-6ae1-8346-b14e31e17320}">
           <p14:sldIdLst>
             <p14:sldId id="256"/>
           </p14:sldIdLst>
         </p14:section>
-        <p14:section name="Gate" id="{aadeb2cc-472b-db12-416e-12c842e54e01}">
+        <p14:section name="Gate" id="{2bf2d075-3e8e-8da3-dfaf-61b8e659ea3d}">
           <p14:sldIdLst>
             <p14:sldId id="257"/>
             <p14:sldId id="258"/>
           </p14:sldIdLst>
         </p14:section>
-        <p14:section name="Pre-teach" id="{d9f7c145-c108-df48-5179-1fff2b41e010}">
+        <p14:section name="Pre-teach" id="{94158a47-c6bd-2f4f-c24e-af7c7b646b24}">
           <p14:sldIdLst>
             <p14:sldId id="259"/>
             <p14:sldId id="260"/>
           </p14:sldIdLst>
         </p14:section>
-        <p14:section name="Read-along" id="{18fc1d86-3ae0-40b4-2625-267cc6dc8677}">
+        <p14:section name="Read-along" id="{eb486fa0-ae8b-2150-fc8a-7a464ee8a9eb}">
           <p14:sldIdLst>
             <p14:sldId id="261"/>
             <p14:sldId id="262"/>
           </p14:sldIdLst>
         </p14:section>
-        <p14:section name="Teach" id="{fd28be1b-bc34-dd77-7578-2780cfaac26e}">
+        <p14:section name="Teach" id="{c3433f1c-59a8-a6a3-e583-0a92c7535091}">
           <p14:sldIdLst>
             <p14:sldId id="263"/>
             <p14:sldId id="264"/>
@@ -158,7 +158,7 @@
             <p14:sldId id="267"/>
           </p14:sldIdLst>
         </p14:section>
-        <p14:section name="Routes" id="{2275c841-c8fb-599a-6f18-763f4f217307}">
+        <p14:section name="Routes" id="{21c90964-e727-cea5-5952-0b5b351bed12}">
           <p14:sldIdLst>
             <p14:sldId id="268"/>
             <p14:sldId id="269"/>
@@ -166,12 +166,12 @@
             <p14:sldId id="271"/>
           </p14:sldIdLst>
         </p14:section>
-        <p14:section name="Close" id="{c176b48a-05e9-ff71-80ba-a5df4fa20caa}">
+        <p14:section name="Close" id="{bc03fc66-6a76-15eb-fbdc-42b2f8ca9280}">
           <p14:sldIdLst>
             <p14:sldId id="272"/>
           </p14:sldIdLst>
         </p14:section>
-        <p14:section name="Answers" id="{3a5122b7-1ca1-7de4-9c66-f13b171a7bb5}">
+        <p14:section name="Answers" id="{8fded234-7dd3-1182-c2f1-4d4d7cd16139}">
           <p14:sldIdLst>
             <p14:sldId id="273"/>
             <p14:sldId id="274"/>
